--- a/51-AI部署研究/11-企业AI基础设施建设方案建议/11-企业AI基础设施建设方案建议.pptx
+++ b/51-AI部署研究/11-企业AI基础设施建设方案建议/11-企业AI基础设施建设方案建议.pptx
@@ -8064,7 +8064,7 @@
                 <a:spcPts val="0"/>
               </a:spcBef>
               <a:spcAft>
-                <a:spcPts val="1000"/>
+                <a:spcPts val="800"/>
               </a:spcAft>
             </a:pPr>
             <a:r>
@@ -8076,7 +8076,7 @@
                 <a:ea typeface="微软雅黑"/>
                 <a:cs typeface="微软雅黑"/>
               </a:rPr>
-              <a:t>在线推理一期 96 卡（约 100 张） · 一次性约 ¥850~1100 万 · 年运营 ¥110~160 万</a:t>
+              <a:t>引擎 A · 在线推理一期 96 卡（12 台 8 卡机）：一次性 CapEx ¥850~1100 万 · 年运营 ¥110~160 万（估算·待询价）</a:t>
             </a:r>
           </a:p>
           <a:p>
@@ -8088,10 +8088,34 @@
                 <a:spcPts val="0"/>
               </a:spcBef>
               <a:spcAft>
-                <a:spcPts val="0"/>
+                <a:spcPts val="800"/>
               </a:spcAft>
             </a:pPr>
             <a:r>
+              <a:rPr b="0" sz="1300">
+                <a:solidFill>
+                  <a:srgbClr val="6B727C"/>
+                </a:solidFill>
+                <a:latin typeface="微软雅黑"/>
+                <a:ea typeface="微软雅黑"/>
+                <a:cs typeface="微软雅黑"/>
+              </a:rPr>
+              <a:t>整体预算边界（A+B 上界，估算·待询价）≈ ¥3000~4400 万 · C 与人力另计（见 P56）</a:t>
+            </a:r>
+          </a:p>
+          <a:p>
+            <a:pPr algn="l">
+              <a:lnSpc>
+                <a:spcPct val="112000"/>
+              </a:lnSpc>
+              <a:spcBef>
+                <a:spcPts val="0"/>
+              </a:spcBef>
+              <a:spcAft>
+                <a:spcPts val="0"/>
+              </a:spcAft>
+            </a:pPr>
+            <a:r>
               <a:rPr b="0" sz="1200">
                 <a:solidFill>
                   <a:srgbClr val="6B727C"/>
@@ -8100,7 +8124,7 @@
                 <a:ea typeface="微软雅黑"/>
                 <a:cs typeface="微软雅黑"/>
               </a:rPr>
-              <a:t>汇报人 / 2026-09-07</a:t>
+              <a:t>汇报人 / 2026-09-09</a:t>
             </a:r>
           </a:p>
         </p:txBody>
@@ -35545,7 +35569,7 @@
                           <a:ea typeface="微软雅黑"/>
                           <a:cs typeface="微软雅黑"/>
                         </a:rPr>
-                        <a:t>金额（估）</a:t>
+                        <a:t>金额（估算·待询价）</a:t>
                       </a:r>
                     </a:p>
                   </a:txBody>
@@ -36014,7 +36038,7 @@
         <p:spPr>
           <a:xfrm>
             <a:off x="566928" y="3976370"/>
-            <a:ext cx="11002975" cy="1038026"/>
+            <a:ext cx="11002975" cy="1529608"/>
           </a:xfrm>
           <a:prstGeom prst="rect">
             <a:avLst/>
@@ -36026,6 +36050,52 @@
             <a:noAutofit/>
           </a:bodyPr>
           <a:lstStyle/>
+          <a:p>
+            <a:pPr>
+              <a:lnSpc>
+                <a:spcPct val="114000"/>
+              </a:lnSpc>
+              <a:spcBef>
+                <a:spcPts val="0"/>
+              </a:spcBef>
+              <a:spcAft>
+                <a:spcPts val="500"/>
+              </a:spcAft>
+            </a:pPr>
+            <a:r>
+              <a:rPr b="0" sz="1400">
+                <a:solidFill>
+                  <a:srgbClr val="33383F"/>
+                </a:solidFill>
+                <a:latin typeface="微软雅黑"/>
+                <a:ea typeface="微软雅黑"/>
+                <a:cs typeface="微软雅黑"/>
+              </a:rPr>
+              <a:t>&gt; 注：本表 CapEx / OpEx 为</a:t>
+            </a:r>
+            <a:r>
+              <a:rPr b="1" sz="1400">
+                <a:solidFill>
+                  <a:srgbClr val="33383F"/>
+                </a:solidFill>
+                <a:latin typeface="微软雅黑"/>
+                <a:ea typeface="微软雅黑"/>
+                <a:cs typeface="微软雅黑"/>
+              </a:rPr>
+              <a:t>估算·待询价</a:t>
+            </a:r>
+            <a:r>
+              <a:rPr b="0" sz="1400">
+                <a:solidFill>
+                  <a:srgbClr val="33383F"/>
+                </a:solidFill>
+                <a:latin typeface="微软雅黑"/>
+                <a:ea typeface="微软雅黑"/>
+                <a:cs typeface="微软雅黑"/>
+              </a:rPr>
+              <a:t>（口径 P03）；硬件下界依赖集采折扣、偏乐观〔01-Q27〕，询价后回填。</a:t>
+            </a:r>
+          </a:p>
           <a:p>
             <a:pPr>
               <a:lnSpc>
@@ -40164,7 +40234,7 @@
                           <a:ea typeface="微软雅黑"/>
                           <a:cs typeface="微软雅黑"/>
                         </a:rPr>
-                        <a:t>单套（估）</a:t>
+                        <a:t>单套（估算·待询价）</a:t>
                       </a:r>
                     </a:p>
                   </a:txBody>
@@ -40193,7 +40263,7 @@
                           <a:ea typeface="微软雅黑"/>
                           <a:cs typeface="微软雅黑"/>
                         </a:rPr>
-                        <a:t>×10（估）</a:t>
+                        <a:t>×10（估算·待询价）</a:t>
                       </a:r>
                     </a:p>
                   </a:txBody>
@@ -40452,7 +40522,7 @@
         </p:nvSpPr>
         <p:spPr>
           <a:xfrm>
-            <a:off x="566928" y="3290824"/>
+            <a:off x="566928" y="3469005"/>
             <a:ext cx="11002975" cy="2476357"/>
           </a:xfrm>
           <a:prstGeom prst="rect">
@@ -42486,7 +42556,7 @@
                           <a:ea typeface="微软雅黑"/>
                           <a:cs typeface="微软雅黑"/>
                         </a:rPr>
-                        <a:t>一次性规模（估）</a:t>
+                        <a:t>一次性规模（估算·待询价）</a:t>
                       </a:r>
                     </a:p>
                   </a:txBody>
@@ -42776,7 +42846,7 @@
         </p:nvSpPr>
         <p:spPr>
           <a:xfrm>
-            <a:off x="566928" y="3222371"/>
+            <a:off x="566928" y="3400552"/>
             <a:ext cx="11002975" cy="1757192"/>
           </a:xfrm>
           <a:prstGeom prst="rect">
@@ -47343,7 +47413,7 @@
                           <a:ea typeface="微软雅黑"/>
                           <a:cs typeface="微软雅黑"/>
                         </a:rPr>
-                        <a:t>金额（估）</a:t>
+                        <a:t>金额（估算·待询价）</a:t>
                       </a:r>
                     </a:p>
                   </a:txBody>
@@ -47808,7 +47878,7 @@
                           <a:ea typeface="微软雅黑"/>
                           <a:cs typeface="微软雅黑"/>
                         </a:rPr>
-                        <a:t>金额（估）</a:t>
+                        <a:t>金额（估算·待询价）</a:t>
                       </a:r>
                     </a:p>
                   </a:txBody>
@@ -48086,7 +48156,7 @@
                           <a:ea typeface="微软雅黑"/>
                           <a:cs typeface="微软雅黑"/>
                         </a:rPr>
-                        <a:t>（C 与人力另计）</a:t>
+                        <a:t>〔估算·待询价〕（C 与人力另计）</a:t>
                       </a:r>
                     </a:p>
                   </a:txBody>
